--- a/ゲーム科2年/00_前期/ゲームエンジンⅢ/バージョン管理/05_Pull.pptx
+++ b/ゲーム科2年/00_前期/ゲームエンジンⅢ/バージョン管理/05_Pull.pptx
@@ -262,7 +262,7 @@
           <a:p>
             <a:fld id="{E9CC885B-4903-4D54-9A93-00025F12DED9}" type="datetimeFigureOut">
               <a:rPr kumimoji="1" lang="ja-JP" altLang="en-US" smtClean="0"/>
-              <a:t>2025/1/16</a:t>
+              <a:t>2025/1/17</a:t>
             </a:fld>
             <a:endParaRPr kumimoji="1" lang="ja-JP" altLang="en-US"/>
           </a:p>
@@ -492,7 +492,7 @@
           <a:p>
             <a:fld id="{E9CC885B-4903-4D54-9A93-00025F12DED9}" type="datetimeFigureOut">
               <a:rPr kumimoji="1" lang="ja-JP" altLang="en-US" smtClean="0"/>
-              <a:t>2025/1/16</a:t>
+              <a:t>2025/1/17</a:t>
             </a:fld>
             <a:endParaRPr kumimoji="1" lang="ja-JP" altLang="en-US"/>
           </a:p>
@@ -732,7 +732,7 @@
           <a:p>
             <a:fld id="{E9CC885B-4903-4D54-9A93-00025F12DED9}" type="datetimeFigureOut">
               <a:rPr kumimoji="1" lang="ja-JP" altLang="en-US" smtClean="0"/>
-              <a:t>2025/1/16</a:t>
+              <a:t>2025/1/17</a:t>
             </a:fld>
             <a:endParaRPr kumimoji="1" lang="ja-JP" altLang="en-US"/>
           </a:p>
@@ -962,7 +962,7 @@
           <a:p>
             <a:fld id="{E9CC885B-4903-4D54-9A93-00025F12DED9}" type="datetimeFigureOut">
               <a:rPr kumimoji="1" lang="ja-JP" altLang="en-US" smtClean="0"/>
-              <a:t>2025/1/16</a:t>
+              <a:t>2025/1/17</a:t>
             </a:fld>
             <a:endParaRPr kumimoji="1" lang="ja-JP" altLang="en-US"/>
           </a:p>
@@ -1237,7 +1237,7 @@
           <a:p>
             <a:fld id="{E9CC885B-4903-4D54-9A93-00025F12DED9}" type="datetimeFigureOut">
               <a:rPr kumimoji="1" lang="ja-JP" altLang="en-US" smtClean="0"/>
-              <a:t>2025/1/16</a:t>
+              <a:t>2025/1/17</a:t>
             </a:fld>
             <a:endParaRPr kumimoji="1" lang="ja-JP" altLang="en-US"/>
           </a:p>
@@ -1566,7 +1566,7 @@
           <a:p>
             <a:fld id="{E9CC885B-4903-4D54-9A93-00025F12DED9}" type="datetimeFigureOut">
               <a:rPr kumimoji="1" lang="ja-JP" altLang="en-US" smtClean="0"/>
-              <a:t>2025/1/16</a:t>
+              <a:t>2025/1/17</a:t>
             </a:fld>
             <a:endParaRPr kumimoji="1" lang="ja-JP" altLang="en-US"/>
           </a:p>
@@ -2042,7 +2042,7 @@
           <a:p>
             <a:fld id="{E9CC885B-4903-4D54-9A93-00025F12DED9}" type="datetimeFigureOut">
               <a:rPr kumimoji="1" lang="ja-JP" altLang="en-US" smtClean="0"/>
-              <a:t>2025/1/16</a:t>
+              <a:t>2025/1/17</a:t>
             </a:fld>
             <a:endParaRPr kumimoji="1" lang="ja-JP" altLang="en-US"/>
           </a:p>
@@ -2183,7 +2183,7 @@
           <a:p>
             <a:fld id="{E9CC885B-4903-4D54-9A93-00025F12DED9}" type="datetimeFigureOut">
               <a:rPr kumimoji="1" lang="ja-JP" altLang="en-US" smtClean="0"/>
-              <a:t>2025/1/16</a:t>
+              <a:t>2025/1/17</a:t>
             </a:fld>
             <a:endParaRPr kumimoji="1" lang="ja-JP" altLang="en-US"/>
           </a:p>
@@ -2296,7 +2296,7 @@
           <a:p>
             <a:fld id="{E9CC885B-4903-4D54-9A93-00025F12DED9}" type="datetimeFigureOut">
               <a:rPr kumimoji="1" lang="ja-JP" altLang="en-US" smtClean="0"/>
-              <a:t>2025/1/16</a:t>
+              <a:t>2025/1/17</a:t>
             </a:fld>
             <a:endParaRPr kumimoji="1" lang="ja-JP" altLang="en-US"/>
           </a:p>
@@ -2639,7 +2639,7 @@
           <a:p>
             <a:fld id="{E9CC885B-4903-4D54-9A93-00025F12DED9}" type="datetimeFigureOut">
               <a:rPr kumimoji="1" lang="ja-JP" altLang="en-US" smtClean="0"/>
-              <a:t>2025/1/16</a:t>
+              <a:t>2025/1/17</a:t>
             </a:fld>
             <a:endParaRPr kumimoji="1" lang="ja-JP" altLang="en-US"/>
           </a:p>
@@ -2927,7 +2927,7 @@
           <a:p>
             <a:fld id="{E9CC885B-4903-4D54-9A93-00025F12DED9}" type="datetimeFigureOut">
               <a:rPr kumimoji="1" lang="ja-JP" altLang="en-US" smtClean="0"/>
-              <a:t>2025/1/16</a:t>
+              <a:t>2025/1/17</a:t>
             </a:fld>
             <a:endParaRPr kumimoji="1" lang="ja-JP" altLang="en-US"/>
           </a:p>
@@ -3200,7 +3200,7 @@
           <a:p>
             <a:fld id="{E9CC885B-4903-4D54-9A93-00025F12DED9}" type="datetimeFigureOut">
               <a:rPr kumimoji="1" lang="ja-JP" altLang="en-US" smtClean="0"/>
-              <a:t>2025/1/16</a:t>
+              <a:t>2025/1/17</a:t>
             </a:fld>
             <a:endParaRPr kumimoji="1" lang="ja-JP" altLang="en-US"/>
           </a:p>
@@ -3695,7 +3695,7 @@
                   <a:srgbClr val="FF0000"/>
                 </a:solidFill>
               </a:rPr>
-              <a:t>メンバーのみ作業してください</a:t>
+              <a:t>リーダー以外のメンバーのみ作業してください</a:t>
             </a:r>
             <a:endParaRPr lang="en-US" altLang="ja-JP" sz="2400" b="1" dirty="0">
               <a:solidFill>
@@ -4843,7 +4843,7 @@
         <p:spPr>
           <a:xfrm>
             <a:off x="567542" y="1216429"/>
-            <a:ext cx="8730275" cy="2308324"/>
+            <a:ext cx="9653605" cy="1938992"/>
           </a:xfrm>
           <a:prstGeom prst="rect">
             <a:avLst/>
@@ -4870,7 +4870,7 @@
                   <a:srgbClr val="FF0000"/>
                 </a:solidFill>
               </a:rPr>
-              <a:t>プロジェクトを最新の状態</a:t>
+              <a:t>手元のプロジェクトを最新の状態</a:t>
             </a:r>
             <a:r>
               <a:rPr lang="ja-JP" altLang="en-US" sz="2400" dirty="0"/>
@@ -4914,30 +4914,19 @@
           <a:p>
             <a:r>
               <a:rPr lang="ja-JP" altLang="en-US" sz="2400" dirty="0"/>
-              <a:t>定期的には</a:t>
+              <a:t>定期的に</a:t>
             </a:r>
             <a:r>
               <a:rPr lang="en-US" altLang="ja-JP" sz="2400" dirty="0"/>
               <a:t>Pull</a:t>
             </a:r>
             <a:r>
+              <a:rPr lang="ja-JP" altLang="en-US" sz="2400"/>
+              <a:t>しないと手元のプロジェクト</a:t>
+            </a:r>
+            <a:r>
               <a:rPr lang="ja-JP" altLang="en-US" sz="2400" dirty="0"/>
-              <a:t>しないとプロジェクトが古いままになります。</a:t>
-            </a:r>
-            <a:endParaRPr lang="en-US" altLang="ja-JP" sz="2400" dirty="0"/>
-          </a:p>
-          <a:p>
-            <a:r>
-              <a:rPr lang="ja-JP" altLang="en-US" sz="2400" dirty="0"/>
-              <a:t>「毎日作業前に１回</a:t>
-            </a:r>
-            <a:r>
-              <a:rPr lang="en-US" altLang="ja-JP" sz="2400" dirty="0"/>
-              <a:t>Pull</a:t>
-            </a:r>
-            <a:r>
-              <a:rPr lang="ja-JP" altLang="en-US" sz="2400" dirty="0"/>
-              <a:t>」など決めごとをしておきましょう。</a:t>
+              <a:t>が古いままになります。</a:t>
             </a:r>
             <a:endParaRPr lang="en-US" altLang="ja-JP" sz="2400" dirty="0"/>
           </a:p>

--- a/ゲーム科2年/00_前期/ゲームエンジンⅢ/バージョン管理/05_Pull.pptx
+++ b/ゲーム科2年/00_前期/ゲームエンジンⅢ/バージョン管理/05_Pull.pptx
@@ -262,7 +262,7 @@
           <a:p>
             <a:fld id="{E9CC885B-4903-4D54-9A93-00025F12DED9}" type="datetimeFigureOut">
               <a:rPr kumimoji="1" lang="ja-JP" altLang="en-US" smtClean="0"/>
-              <a:t>2025/1/17</a:t>
+              <a:t>2025/1/27</a:t>
             </a:fld>
             <a:endParaRPr kumimoji="1" lang="ja-JP" altLang="en-US"/>
           </a:p>
@@ -492,7 +492,7 @@
           <a:p>
             <a:fld id="{E9CC885B-4903-4D54-9A93-00025F12DED9}" type="datetimeFigureOut">
               <a:rPr kumimoji="1" lang="ja-JP" altLang="en-US" smtClean="0"/>
-              <a:t>2025/1/17</a:t>
+              <a:t>2025/1/27</a:t>
             </a:fld>
             <a:endParaRPr kumimoji="1" lang="ja-JP" altLang="en-US"/>
           </a:p>
@@ -732,7 +732,7 @@
           <a:p>
             <a:fld id="{E9CC885B-4903-4D54-9A93-00025F12DED9}" type="datetimeFigureOut">
               <a:rPr kumimoji="1" lang="ja-JP" altLang="en-US" smtClean="0"/>
-              <a:t>2025/1/17</a:t>
+              <a:t>2025/1/27</a:t>
             </a:fld>
             <a:endParaRPr kumimoji="1" lang="ja-JP" altLang="en-US"/>
           </a:p>
@@ -962,7 +962,7 @@
           <a:p>
             <a:fld id="{E9CC885B-4903-4D54-9A93-00025F12DED9}" type="datetimeFigureOut">
               <a:rPr kumimoji="1" lang="ja-JP" altLang="en-US" smtClean="0"/>
-              <a:t>2025/1/17</a:t>
+              <a:t>2025/1/27</a:t>
             </a:fld>
             <a:endParaRPr kumimoji="1" lang="ja-JP" altLang="en-US"/>
           </a:p>
@@ -1237,7 +1237,7 @@
           <a:p>
             <a:fld id="{E9CC885B-4903-4D54-9A93-00025F12DED9}" type="datetimeFigureOut">
               <a:rPr kumimoji="1" lang="ja-JP" altLang="en-US" smtClean="0"/>
-              <a:t>2025/1/17</a:t>
+              <a:t>2025/1/27</a:t>
             </a:fld>
             <a:endParaRPr kumimoji="1" lang="ja-JP" altLang="en-US"/>
           </a:p>
@@ -1566,7 +1566,7 @@
           <a:p>
             <a:fld id="{E9CC885B-4903-4D54-9A93-00025F12DED9}" type="datetimeFigureOut">
               <a:rPr kumimoji="1" lang="ja-JP" altLang="en-US" smtClean="0"/>
-              <a:t>2025/1/17</a:t>
+              <a:t>2025/1/27</a:t>
             </a:fld>
             <a:endParaRPr kumimoji="1" lang="ja-JP" altLang="en-US"/>
           </a:p>
@@ -2042,7 +2042,7 @@
           <a:p>
             <a:fld id="{E9CC885B-4903-4D54-9A93-00025F12DED9}" type="datetimeFigureOut">
               <a:rPr kumimoji="1" lang="ja-JP" altLang="en-US" smtClean="0"/>
-              <a:t>2025/1/17</a:t>
+              <a:t>2025/1/27</a:t>
             </a:fld>
             <a:endParaRPr kumimoji="1" lang="ja-JP" altLang="en-US"/>
           </a:p>
@@ -2183,7 +2183,7 @@
           <a:p>
             <a:fld id="{E9CC885B-4903-4D54-9A93-00025F12DED9}" type="datetimeFigureOut">
               <a:rPr kumimoji="1" lang="ja-JP" altLang="en-US" smtClean="0"/>
-              <a:t>2025/1/17</a:t>
+              <a:t>2025/1/27</a:t>
             </a:fld>
             <a:endParaRPr kumimoji="1" lang="ja-JP" altLang="en-US"/>
           </a:p>
@@ -2296,7 +2296,7 @@
           <a:p>
             <a:fld id="{E9CC885B-4903-4D54-9A93-00025F12DED9}" type="datetimeFigureOut">
               <a:rPr kumimoji="1" lang="ja-JP" altLang="en-US" smtClean="0"/>
-              <a:t>2025/1/17</a:t>
+              <a:t>2025/1/27</a:t>
             </a:fld>
             <a:endParaRPr kumimoji="1" lang="ja-JP" altLang="en-US"/>
           </a:p>
@@ -2639,7 +2639,7 @@
           <a:p>
             <a:fld id="{E9CC885B-4903-4D54-9A93-00025F12DED9}" type="datetimeFigureOut">
               <a:rPr kumimoji="1" lang="ja-JP" altLang="en-US" smtClean="0"/>
-              <a:t>2025/1/17</a:t>
+              <a:t>2025/1/27</a:t>
             </a:fld>
             <a:endParaRPr kumimoji="1" lang="ja-JP" altLang="en-US"/>
           </a:p>
@@ -2927,7 +2927,7 @@
           <a:p>
             <a:fld id="{E9CC885B-4903-4D54-9A93-00025F12DED9}" type="datetimeFigureOut">
               <a:rPr kumimoji="1" lang="ja-JP" altLang="en-US" smtClean="0"/>
-              <a:t>2025/1/17</a:t>
+              <a:t>2025/1/27</a:t>
             </a:fld>
             <a:endParaRPr kumimoji="1" lang="ja-JP" altLang="en-US"/>
           </a:p>
@@ -3200,7 +3200,7 @@
           <a:p>
             <a:fld id="{E9CC885B-4903-4D54-9A93-00025F12DED9}" type="datetimeFigureOut">
               <a:rPr kumimoji="1" lang="ja-JP" altLang="en-US" smtClean="0"/>
-              <a:t>2025/1/17</a:t>
+              <a:t>2025/1/27</a:t>
             </a:fld>
             <a:endParaRPr kumimoji="1" lang="ja-JP" altLang="en-US"/>
           </a:p>
@@ -4536,7 +4536,7 @@
         <p:spPr>
           <a:xfrm>
             <a:off x="567542" y="1216429"/>
-            <a:ext cx="9417963" cy="830997"/>
+            <a:ext cx="6955750" cy="830997"/>
           </a:xfrm>
           <a:prstGeom prst="rect">
             <a:avLst/>
@@ -4551,7 +4551,7 @@
           <a:p>
             <a:r>
               <a:rPr lang="ja-JP" altLang="en-US" sz="2400" dirty="0"/>
-              <a:t>クローンで取得したフォルダ（大元のフォルダ）を右クリックし、</a:t>
+              <a:t>クローンで取得したフォルダ内で右クリックし、</a:t>
             </a:r>
             <a:endParaRPr lang="en-US" altLang="ja-JP" sz="2400" dirty="0"/>
           </a:p>

--- a/ゲーム科2年/00_前期/ゲームエンジンⅢ/バージョン管理/05_Pull.pptx
+++ b/ゲーム科2年/00_前期/ゲームエンジンⅢ/バージョン管理/05_Pull.pptx
@@ -262,7 +262,7 @@
           <a:p>
             <a:fld id="{E9CC885B-4903-4D54-9A93-00025F12DED9}" type="datetimeFigureOut">
               <a:rPr kumimoji="1" lang="ja-JP" altLang="en-US" smtClean="0"/>
-              <a:t>2025/1/27</a:t>
+              <a:t>2025/2/27</a:t>
             </a:fld>
             <a:endParaRPr kumimoji="1" lang="ja-JP" altLang="en-US"/>
           </a:p>
@@ -492,7 +492,7 @@
           <a:p>
             <a:fld id="{E9CC885B-4903-4D54-9A93-00025F12DED9}" type="datetimeFigureOut">
               <a:rPr kumimoji="1" lang="ja-JP" altLang="en-US" smtClean="0"/>
-              <a:t>2025/1/27</a:t>
+              <a:t>2025/2/27</a:t>
             </a:fld>
             <a:endParaRPr kumimoji="1" lang="ja-JP" altLang="en-US"/>
           </a:p>
@@ -732,7 +732,7 @@
           <a:p>
             <a:fld id="{E9CC885B-4903-4D54-9A93-00025F12DED9}" type="datetimeFigureOut">
               <a:rPr kumimoji="1" lang="ja-JP" altLang="en-US" smtClean="0"/>
-              <a:t>2025/1/27</a:t>
+              <a:t>2025/2/27</a:t>
             </a:fld>
             <a:endParaRPr kumimoji="1" lang="ja-JP" altLang="en-US"/>
           </a:p>
@@ -962,7 +962,7 @@
           <a:p>
             <a:fld id="{E9CC885B-4903-4D54-9A93-00025F12DED9}" type="datetimeFigureOut">
               <a:rPr kumimoji="1" lang="ja-JP" altLang="en-US" smtClean="0"/>
-              <a:t>2025/1/27</a:t>
+              <a:t>2025/2/27</a:t>
             </a:fld>
             <a:endParaRPr kumimoji="1" lang="ja-JP" altLang="en-US"/>
           </a:p>
@@ -1237,7 +1237,7 @@
           <a:p>
             <a:fld id="{E9CC885B-4903-4D54-9A93-00025F12DED9}" type="datetimeFigureOut">
               <a:rPr kumimoji="1" lang="ja-JP" altLang="en-US" smtClean="0"/>
-              <a:t>2025/1/27</a:t>
+              <a:t>2025/2/27</a:t>
             </a:fld>
             <a:endParaRPr kumimoji="1" lang="ja-JP" altLang="en-US"/>
           </a:p>
@@ -1566,7 +1566,7 @@
           <a:p>
             <a:fld id="{E9CC885B-4903-4D54-9A93-00025F12DED9}" type="datetimeFigureOut">
               <a:rPr kumimoji="1" lang="ja-JP" altLang="en-US" smtClean="0"/>
-              <a:t>2025/1/27</a:t>
+              <a:t>2025/2/27</a:t>
             </a:fld>
             <a:endParaRPr kumimoji="1" lang="ja-JP" altLang="en-US"/>
           </a:p>
@@ -2042,7 +2042,7 @@
           <a:p>
             <a:fld id="{E9CC885B-4903-4D54-9A93-00025F12DED9}" type="datetimeFigureOut">
               <a:rPr kumimoji="1" lang="ja-JP" altLang="en-US" smtClean="0"/>
-              <a:t>2025/1/27</a:t>
+              <a:t>2025/2/27</a:t>
             </a:fld>
             <a:endParaRPr kumimoji="1" lang="ja-JP" altLang="en-US"/>
           </a:p>
@@ -2183,7 +2183,7 @@
           <a:p>
             <a:fld id="{E9CC885B-4903-4D54-9A93-00025F12DED9}" type="datetimeFigureOut">
               <a:rPr kumimoji="1" lang="ja-JP" altLang="en-US" smtClean="0"/>
-              <a:t>2025/1/27</a:t>
+              <a:t>2025/2/27</a:t>
             </a:fld>
             <a:endParaRPr kumimoji="1" lang="ja-JP" altLang="en-US"/>
           </a:p>
@@ -2296,7 +2296,7 @@
           <a:p>
             <a:fld id="{E9CC885B-4903-4D54-9A93-00025F12DED9}" type="datetimeFigureOut">
               <a:rPr kumimoji="1" lang="ja-JP" altLang="en-US" smtClean="0"/>
-              <a:t>2025/1/27</a:t>
+              <a:t>2025/2/27</a:t>
             </a:fld>
             <a:endParaRPr kumimoji="1" lang="ja-JP" altLang="en-US"/>
           </a:p>
@@ -2639,7 +2639,7 @@
           <a:p>
             <a:fld id="{E9CC885B-4903-4D54-9A93-00025F12DED9}" type="datetimeFigureOut">
               <a:rPr kumimoji="1" lang="ja-JP" altLang="en-US" smtClean="0"/>
-              <a:t>2025/1/27</a:t>
+              <a:t>2025/2/27</a:t>
             </a:fld>
             <a:endParaRPr kumimoji="1" lang="ja-JP" altLang="en-US"/>
           </a:p>
@@ -2927,7 +2927,7 @@
           <a:p>
             <a:fld id="{E9CC885B-4903-4D54-9A93-00025F12DED9}" type="datetimeFigureOut">
               <a:rPr kumimoji="1" lang="ja-JP" altLang="en-US" smtClean="0"/>
-              <a:t>2025/1/27</a:t>
+              <a:t>2025/2/27</a:t>
             </a:fld>
             <a:endParaRPr kumimoji="1" lang="ja-JP" altLang="en-US"/>
           </a:p>
@@ -3200,7 +3200,7 @@
           <a:p>
             <a:fld id="{E9CC885B-4903-4D54-9A93-00025F12DED9}" type="datetimeFigureOut">
               <a:rPr kumimoji="1" lang="ja-JP" altLang="en-US" smtClean="0"/>
-              <a:t>2025/1/27</a:t>
+              <a:t>2025/2/27</a:t>
             </a:fld>
             <a:endParaRPr kumimoji="1" lang="ja-JP" altLang="en-US"/>
           </a:p>
@@ -4536,7 +4536,7 @@
         <p:spPr>
           <a:xfrm>
             <a:off x="567542" y="1216429"/>
-            <a:ext cx="6955750" cy="830997"/>
+            <a:ext cx="9725739" cy="830997"/>
           </a:xfrm>
           <a:prstGeom prst="rect">
             <a:avLst/>
@@ -4551,7 +4551,7 @@
           <a:p>
             <a:r>
               <a:rPr lang="ja-JP" altLang="en-US" sz="2400" dirty="0"/>
-              <a:t>クローンで取得したフォルダ内で右クリックし、</a:t>
+              <a:t>クローンで取得したフォルダ内の空いている場所を右クリックし、</a:t>
             </a:r>
             <a:endParaRPr lang="en-US" altLang="ja-JP" sz="2400" dirty="0"/>
           </a:p>
